--- a/10-Knowledge-Products/KP2-GIF/videos/module_1/en/decks/KP2_M1_1.7_Deck_v0.1.pptx
+++ b/10-Knowledge-Products/KP2-GIF/videos/module_1/en/decks/KP2_M1_1.7_Deck_v0.1.pptx
@@ -11641,7 +11641,7 @@
                 </a:solidFill>
                 <a:latin typeface="Arial"/>
               </a:rPr>
-              <a:t>KP2 · MODULE 1 · VIDEO 1.7</a:t>
+              <a:t>MODULE 1 · VIDEO 1.7</a:t>
             </a:r>
           </a:p>
         </p:txBody>
